--- a/Week01/Pertemuan 1.pptx
+++ b/Week01/Pertemuan 1.pptx
@@ -14,7 +14,7 @@
     <p:sldId id="279" r:id="rId5"/>
     <p:sldId id="280" r:id="rId6"/>
     <p:sldId id="259" r:id="rId7"/>
-    <p:sldId id="260" r:id="rId8"/>
+    <p:sldId id="281" r:id="rId8"/>
     <p:sldId id="261" r:id="rId9"/>
     <p:sldId id="262" r:id="rId10"/>
     <p:sldId id="263" r:id="rId11"/>
@@ -8311,13 +8311,13 @@
   <p:clrMapOvr>
     <a:masterClrMapping/>
   </p:clrMapOvr>
-  <mc:AlternateContent xmlns:mc="http://schemas.openxmlformats.org/markup-compatibility/2006">
-    <mc:Choice xmlns:p14="http://schemas.microsoft.com/office/powerpoint/2010/main" Requires="p14">
+  <mc:AlternateContent xmlns:mc="http://schemas.openxmlformats.org/markup-compatibility/2006" xmlns:p14="http://schemas.microsoft.com/office/powerpoint/2010/main">
+    <mc:Choice Requires="p14">
       <p:transition spd="slow" p14:dur="1300">
         <p14:pan dir="u"/>
       </p:transition>
     </mc:Choice>
-    <mc:Fallback>
+    <mc:Fallback xmlns="">
       <p:transition spd="slow">
         <p:fade/>
       </p:transition>
@@ -9479,13 +9479,13 @@
   <p:clrMapOvr>
     <a:masterClrMapping/>
   </p:clrMapOvr>
-  <mc:AlternateContent xmlns:mc="http://schemas.openxmlformats.org/markup-compatibility/2006">
-    <mc:Choice xmlns:p14="http://schemas.microsoft.com/office/powerpoint/2010/main" Requires="p14">
+  <mc:AlternateContent xmlns:mc="http://schemas.openxmlformats.org/markup-compatibility/2006" xmlns:p14="http://schemas.microsoft.com/office/powerpoint/2010/main">
+    <mc:Choice Requires="p14">
       <p:transition spd="slow" p14:dur="1300">
         <p14:pan dir="u"/>
       </p:transition>
     </mc:Choice>
-    <mc:Fallback>
+    <mc:Fallback xmlns="">
       <p:transition spd="slow">
         <p:fade/>
       </p:transition>
@@ -11224,13 +11224,13 @@
   <p:clrMapOvr>
     <a:masterClrMapping/>
   </p:clrMapOvr>
-  <mc:AlternateContent xmlns:mc="http://schemas.openxmlformats.org/markup-compatibility/2006">
-    <mc:Choice xmlns:p14="http://schemas.microsoft.com/office/powerpoint/2010/main" Requires="p14">
+  <mc:AlternateContent xmlns:mc="http://schemas.openxmlformats.org/markup-compatibility/2006" xmlns:p14="http://schemas.microsoft.com/office/powerpoint/2010/main">
+    <mc:Choice Requires="p14">
       <p:transition spd="slow" p14:dur="1300">
         <p14:pan dir="u"/>
       </p:transition>
     </mc:Choice>
-    <mc:Fallback>
+    <mc:Fallback xmlns="">
       <p:transition spd="slow">
         <p:fade/>
       </p:transition>
@@ -11908,13 +11908,13 @@
   <p:clrMapOvr>
     <a:masterClrMapping/>
   </p:clrMapOvr>
-  <mc:AlternateContent xmlns:mc="http://schemas.openxmlformats.org/markup-compatibility/2006">
-    <mc:Choice xmlns:p14="http://schemas.microsoft.com/office/powerpoint/2010/main" Requires="p14">
+  <mc:AlternateContent xmlns:mc="http://schemas.openxmlformats.org/markup-compatibility/2006" xmlns:p14="http://schemas.microsoft.com/office/powerpoint/2010/main">
+    <mc:Choice Requires="p14">
       <p:transition spd="slow" p14:dur="1300">
         <p14:pan dir="u"/>
       </p:transition>
     </mc:Choice>
-    <mc:Fallback>
+    <mc:Fallback xmlns="">
       <p:transition spd="slow">
         <p:fade/>
       </p:transition>
@@ -13144,13 +13144,13 @@
   <p:clrMapOvr>
     <a:masterClrMapping/>
   </p:clrMapOvr>
-  <mc:AlternateContent xmlns:mc="http://schemas.openxmlformats.org/markup-compatibility/2006">
-    <mc:Choice xmlns:p14="http://schemas.microsoft.com/office/powerpoint/2010/main" Requires="p14">
+  <mc:AlternateContent xmlns:mc="http://schemas.openxmlformats.org/markup-compatibility/2006" xmlns:p14="http://schemas.microsoft.com/office/powerpoint/2010/main">
+    <mc:Choice Requires="p14">
       <p:transition spd="slow" p14:dur="1300">
         <p14:pan dir="u"/>
       </p:transition>
     </mc:Choice>
-    <mc:Fallback>
+    <mc:Fallback xmlns="">
       <p:transition spd="slow">
         <p:fade/>
       </p:transition>
@@ -13989,13 +13989,13 @@
   <p:clrMapOvr>
     <a:masterClrMapping/>
   </p:clrMapOvr>
-  <mc:AlternateContent xmlns:mc="http://schemas.openxmlformats.org/markup-compatibility/2006">
-    <mc:Choice xmlns:p14="http://schemas.microsoft.com/office/powerpoint/2010/main" Requires="p14">
+  <mc:AlternateContent xmlns:mc="http://schemas.openxmlformats.org/markup-compatibility/2006" xmlns:p14="http://schemas.microsoft.com/office/powerpoint/2010/main">
+    <mc:Choice Requires="p14">
       <p:transition spd="slow" p14:dur="1300">
         <p14:pan dir="u"/>
       </p:transition>
     </mc:Choice>
-    <mc:Fallback>
+    <mc:Fallback xmlns="">
       <p:transition spd="slow">
         <p:fade/>
       </p:transition>
@@ -14853,13 +14853,13 @@
   <p:clrMapOvr>
     <a:masterClrMapping/>
   </p:clrMapOvr>
-  <mc:AlternateContent xmlns:mc="http://schemas.openxmlformats.org/markup-compatibility/2006">
-    <mc:Choice xmlns:p14="http://schemas.microsoft.com/office/powerpoint/2010/main" Requires="p14">
+  <mc:AlternateContent xmlns:mc="http://schemas.openxmlformats.org/markup-compatibility/2006" xmlns:p14="http://schemas.microsoft.com/office/powerpoint/2010/main">
+    <mc:Choice Requires="p14">
       <p:transition spd="slow" p14:dur="1300">
         <p14:pan dir="u"/>
       </p:transition>
     </mc:Choice>
-    <mc:Fallback>
+    <mc:Fallback xmlns="">
       <p:transition spd="slow">
         <p:fade/>
       </p:transition>
@@ -15376,13 +15376,13 @@
   <p:clrMapOvr>
     <a:masterClrMapping/>
   </p:clrMapOvr>
-  <mc:AlternateContent xmlns:mc="http://schemas.openxmlformats.org/markup-compatibility/2006">
-    <mc:Choice xmlns:p14="http://schemas.microsoft.com/office/powerpoint/2010/main" Requires="p14">
+  <mc:AlternateContent xmlns:mc="http://schemas.openxmlformats.org/markup-compatibility/2006" xmlns:p14="http://schemas.microsoft.com/office/powerpoint/2010/main">
+    <mc:Choice Requires="p14">
       <p:transition spd="slow" p14:dur="1300">
         <p14:pan dir="u"/>
       </p:transition>
     </mc:Choice>
-    <mc:Fallback>
+    <mc:Fallback xmlns="">
       <p:transition spd="slow">
         <p:fade/>
       </p:transition>
@@ -16122,13 +16122,13 @@
   <p:clrMapOvr>
     <a:masterClrMapping/>
   </p:clrMapOvr>
-  <mc:AlternateContent xmlns:mc="http://schemas.openxmlformats.org/markup-compatibility/2006">
-    <mc:Choice xmlns:p14="http://schemas.microsoft.com/office/powerpoint/2010/main" Requires="p14">
+  <mc:AlternateContent xmlns:mc="http://schemas.openxmlformats.org/markup-compatibility/2006" xmlns:p14="http://schemas.microsoft.com/office/powerpoint/2010/main">
+    <mc:Choice Requires="p14">
       <p:transition spd="slow" p14:dur="1300">
         <p14:pan dir="u"/>
       </p:transition>
     </mc:Choice>
-    <mc:Fallback>
+    <mc:Fallback xmlns="">
       <p:transition spd="slow">
         <p:fade/>
       </p:transition>
@@ -17420,13 +17420,13 @@
   <p:clrMapOvr>
     <a:masterClrMapping/>
   </p:clrMapOvr>
-  <mc:AlternateContent xmlns:mc="http://schemas.openxmlformats.org/markup-compatibility/2006">
-    <mc:Choice xmlns:p14="http://schemas.microsoft.com/office/powerpoint/2010/main" Requires="p14">
+  <mc:AlternateContent xmlns:mc="http://schemas.openxmlformats.org/markup-compatibility/2006" xmlns:p14="http://schemas.microsoft.com/office/powerpoint/2010/main">
+    <mc:Choice Requires="p14">
       <p:transition spd="slow" p14:dur="1300">
         <p14:pan dir="u"/>
       </p:transition>
     </mc:Choice>
-    <mc:Fallback>
+    <mc:Fallback xmlns="">
       <p:transition spd="slow">
         <p:fade/>
       </p:transition>
@@ -19187,7 +19187,7 @@
             <a:bodyPr/>
             <a:lstStyle/>
             <a:p>
-              <a:endParaRPr lang="en-ID"/>
+              <a:endParaRPr lang="en-US"/>
             </a:p>
           </p:txBody>
         </p:sp>
@@ -19268,17 +19268,20 @@
           </a:bodyPr>
           <a:lstStyle/>
           <a:p>
-            <a:pPr>
+            <a:pPr algn="l">
               <a:lnSpc>
                 <a:spcPts val="3947"/>
               </a:lnSpc>
             </a:pPr>
             <a:r>
-              <a:rPr lang="en-US" sz="4200">
+              <a:rPr lang="en-US" sz="4200" b="1">
                 <a:solidFill>
                   <a:srgbClr val="1211CA"/>
                 </a:solidFill>
                 <a:latin typeface="Montserrat Heavy"/>
+                <a:ea typeface="Montserrat Heavy"/>
+                <a:cs typeface="Montserrat Heavy"/>
+                <a:sym typeface="Montserrat Heavy"/>
               </a:rPr>
               <a:t>Penilaian</a:t>
             </a:r>
@@ -19306,62 +19309,23 @@
           </a:bodyPr>
           <a:lstStyle/>
           <a:p>
-            <a:pPr>
+            <a:pPr algn="l">
               <a:lnSpc>
                 <a:spcPts val="3102"/>
               </a:lnSpc>
             </a:pPr>
             <a:r>
-              <a:rPr lang="en-US" sz="3300" b="1" dirty="0" err="1">
+              <a:rPr lang="en-US" sz="3300" b="1">
                 <a:solidFill>
                   <a:srgbClr val="F9B314"/>
                 </a:solidFill>
                 <a:latin typeface="Montserrat Heavy"/>
-              </a:rPr>
-              <a:t>Komponen</a:t>
-            </a:r>
-            <a:r>
-              <a:rPr lang="en-US" sz="3300" b="1" dirty="0">
-                <a:solidFill>
-                  <a:srgbClr val="F9B314"/>
-                </a:solidFill>
-                <a:latin typeface="Montserrat Heavy"/>
-              </a:rPr>
-              <a:t> dan </a:t>
-            </a:r>
-            <a:r>
-              <a:rPr lang="en-US" sz="3300" b="1" dirty="0" err="1">
-                <a:solidFill>
-                  <a:srgbClr val="F9B314"/>
-                </a:solidFill>
-                <a:latin typeface="Montserrat Heavy"/>
-              </a:rPr>
-              <a:t>Bobot</a:t>
-            </a:r>
-            <a:r>
-              <a:rPr lang="en-US" sz="3300" b="1" dirty="0">
-                <a:solidFill>
-                  <a:srgbClr val="F9B314"/>
-                </a:solidFill>
-                <a:latin typeface="Montserrat Heavy"/>
-              </a:rPr>
-              <a:t> </a:t>
-            </a:r>
-            <a:r>
-              <a:rPr lang="en-US" sz="3300" b="1" dirty="0" err="1">
-                <a:solidFill>
-                  <a:srgbClr val="F9B314"/>
-                </a:solidFill>
-                <a:latin typeface="Montserrat Heavy"/>
-              </a:rPr>
-              <a:t>Penilaian</a:t>
-            </a:r>
-            <a:endParaRPr lang="en-US" sz="3300" b="1" dirty="0">
-              <a:solidFill>
-                <a:srgbClr val="F9B314"/>
-              </a:solidFill>
-              <a:latin typeface="Montserrat Heavy"/>
-            </a:endParaRPr>
+                <a:ea typeface="Montserrat Heavy"/>
+                <a:cs typeface="Montserrat Heavy"/>
+                <a:sym typeface="Montserrat Heavy"/>
+              </a:rPr>
+              <a:t>Komponen dan Bobot Penilaian</a:t>
+            </a:r>
           </a:p>
         </p:txBody>
       </p:sp>
@@ -19373,57 +19337,36 @@
         </p:nvSpPr>
         <p:spPr>
           <a:xfrm>
-            <a:off x="4505124" y="4743544"/>
-            <a:ext cx="3324456" cy="505523"/>
+            <a:off x="4253175" y="4756872"/>
+            <a:ext cx="4017366" cy="504826"/>
           </a:xfrm>
           <a:prstGeom prst="rect">
             <a:avLst/>
           </a:prstGeom>
         </p:spPr>
         <p:txBody>
-          <a:bodyPr wrap="square" lIns="0" tIns="0" rIns="0" bIns="0" rtlCol="0" anchor="t">
+          <a:bodyPr lIns="0" tIns="0" rIns="0" bIns="0" rtlCol="0" anchor="t">
             <a:spAutoFit/>
           </a:bodyPr>
           <a:lstStyle/>
           <a:p>
-            <a:pPr>
+            <a:pPr algn="l">
               <a:lnSpc>
                 <a:spcPts val="4199"/>
               </a:lnSpc>
             </a:pPr>
             <a:r>
-              <a:rPr lang="en-US" sz="2999" dirty="0" err="1">
+              <a:rPr lang="en-US" sz="2999" b="1">
                 <a:solidFill>
                   <a:srgbClr val="1211CA"/>
                 </a:solidFill>
                 <a:latin typeface="Montserrat Classic Bold"/>
-              </a:rPr>
-              <a:t>Praktikum</a:t>
-            </a:r>
-            <a:r>
-              <a:rPr lang="en-US" sz="2999" dirty="0">
-                <a:solidFill>
-                  <a:srgbClr val="1211CA"/>
-                </a:solidFill>
-                <a:latin typeface="Montserrat Classic Bold"/>
-              </a:rPr>
-              <a:t> &amp; </a:t>
-            </a:r>
-            <a:r>
-              <a:rPr lang="en-US" sz="2999" dirty="0" err="1">
-                <a:solidFill>
-                  <a:srgbClr val="1211CA"/>
-                </a:solidFill>
-                <a:latin typeface="Montserrat Classic Bold"/>
-              </a:rPr>
-              <a:t>Tugas</a:t>
-            </a:r>
-            <a:endParaRPr lang="en-US" sz="2999" dirty="0">
-              <a:solidFill>
-                <a:srgbClr val="1211CA"/>
-              </a:solidFill>
-              <a:latin typeface="Montserrat Classic Bold"/>
-            </a:endParaRPr>
+                <a:ea typeface="Montserrat Classic Bold"/>
+                <a:cs typeface="Montserrat Classic Bold"/>
+                <a:sym typeface="Montserrat Classic Bold"/>
+              </a:rPr>
+              <a:t>Praktikum &amp; Tugas</a:t>
+            </a:r>
           </a:p>
         </p:txBody>
       </p:sp>
@@ -19448,17 +19391,20 @@
           </a:bodyPr>
           <a:lstStyle/>
           <a:p>
-            <a:pPr>
+            <a:pPr algn="l">
               <a:lnSpc>
                 <a:spcPts val="4199"/>
               </a:lnSpc>
             </a:pPr>
             <a:r>
-              <a:rPr lang="en-US" sz="2999">
+              <a:rPr lang="en-US" sz="2999" b="1">
                 <a:solidFill>
                   <a:srgbClr val="1211CA"/>
                 </a:solidFill>
                 <a:latin typeface="Montserrat Classic Bold"/>
+                <a:ea typeface="Montserrat Classic Bold"/>
+                <a:cs typeface="Montserrat Classic Bold"/>
+                <a:sym typeface="Montserrat Classic Bold"/>
               </a:rPr>
               <a:t>Quiz</a:t>
             </a:r>
@@ -19486,17 +19432,20 @@
           </a:bodyPr>
           <a:lstStyle/>
           <a:p>
-            <a:pPr>
+            <a:pPr algn="l">
               <a:lnSpc>
                 <a:spcPts val="3359"/>
               </a:lnSpc>
             </a:pPr>
             <a:r>
-              <a:rPr lang="en-US" sz="2400">
+              <a:rPr lang="en-US" sz="2400" b="1">
                 <a:solidFill>
                   <a:srgbClr val="101010"/>
                 </a:solidFill>
                 <a:latin typeface="Montserrat Classic Bold"/>
+                <a:ea typeface="Montserrat Classic Bold"/>
+                <a:cs typeface="Montserrat Classic Bold"/>
+                <a:sym typeface="Montserrat Classic Bold"/>
               </a:rPr>
               <a:t>Universitas Logistik dan Bisnis Internasional</a:t>
             </a:r>
@@ -19552,7 +19501,7 @@
           <a:bodyPr/>
           <a:lstStyle/>
           <a:p>
-            <a:endParaRPr lang="en-ID"/>
+            <a:endParaRPr lang="en-US"/>
           </a:p>
         </p:txBody>
       </p:sp>
@@ -19613,7 +19562,7 @@
             <a:bodyPr/>
             <a:lstStyle/>
             <a:p>
-              <a:endParaRPr lang="en-ID"/>
+              <a:endParaRPr lang="en-US"/>
             </a:p>
           </p:txBody>
         </p:sp>
@@ -19670,17 +19619,20 @@
           </a:bodyPr>
           <a:lstStyle/>
           <a:p>
-            <a:pPr>
+            <a:pPr algn="l">
               <a:lnSpc>
                 <a:spcPts val="4199"/>
               </a:lnSpc>
             </a:pPr>
             <a:r>
-              <a:rPr lang="en-US" sz="2999">
+              <a:rPr lang="en-US" sz="2999" b="1">
                 <a:solidFill>
                   <a:srgbClr val="1211CA"/>
                 </a:solidFill>
                 <a:latin typeface="Montserrat Classic Bold"/>
+                <a:ea typeface="Montserrat Classic Bold"/>
+                <a:cs typeface="Montserrat Classic Bold"/>
+                <a:sym typeface="Montserrat Classic Bold"/>
               </a:rPr>
               <a:t>Kehadiran</a:t>
             </a:r>
@@ -19708,17 +19660,20 @@
           </a:bodyPr>
           <a:lstStyle/>
           <a:p>
-            <a:pPr>
+            <a:pPr algn="l">
               <a:lnSpc>
                 <a:spcPts val="4199"/>
               </a:lnSpc>
             </a:pPr>
             <a:r>
-              <a:rPr lang="en-US" sz="2999">
+              <a:rPr lang="en-US" sz="2999" b="1">
                 <a:solidFill>
                   <a:srgbClr val="1211CA"/>
                 </a:solidFill>
                 <a:latin typeface="Montserrat Classic Bold"/>
+                <a:ea typeface="Montserrat Classic Bold"/>
+                <a:cs typeface="Montserrat Classic Bold"/>
+                <a:sym typeface="Montserrat Classic Bold"/>
               </a:rPr>
               <a:t>UTS</a:t>
             </a:r>
@@ -19746,17 +19701,20 @@
           </a:bodyPr>
           <a:lstStyle/>
           <a:p>
-            <a:pPr>
+            <a:pPr algn="l">
               <a:lnSpc>
                 <a:spcPts val="4199"/>
               </a:lnSpc>
             </a:pPr>
             <a:r>
-              <a:rPr lang="en-US" sz="2999">
+              <a:rPr lang="en-US" sz="2999" b="1">
                 <a:solidFill>
                   <a:srgbClr val="1211CA"/>
                 </a:solidFill>
                 <a:latin typeface="Montserrat Classic Bold"/>
+                <a:ea typeface="Montserrat Classic Bold"/>
+                <a:cs typeface="Montserrat Classic Bold"/>
+                <a:sym typeface="Montserrat Classic Bold"/>
               </a:rPr>
               <a:t>UAS</a:t>
             </a:r>
@@ -19864,18 +19822,9 @@
   <p:clrMapOvr>
     <a:masterClrMapping/>
   </p:clrMapOvr>
-  <mc:AlternateContent xmlns:mc="http://schemas.openxmlformats.org/markup-compatibility/2006">
-    <mc:Choice xmlns:p14="http://schemas.microsoft.com/office/powerpoint/2010/main" Requires="p14">
-      <p:transition spd="slow" p14:dur="1300">
-        <p14:pan dir="u"/>
-      </p:transition>
-    </mc:Choice>
-    <mc:Fallback>
-      <p:transition spd="slow">
-        <p:fade/>
-      </p:transition>
-    </mc:Fallback>
-  </mc:AlternateContent>
+  <p:transition>
+    <p:fade/>
+  </p:transition>
 </p:sld>
 </file>
 
@@ -21931,13 +21880,13 @@
   <p:clrMapOvr>
     <a:masterClrMapping/>
   </p:clrMapOvr>
-  <mc:AlternateContent xmlns:mc="http://schemas.openxmlformats.org/markup-compatibility/2006">
-    <mc:Choice xmlns:p14="http://schemas.microsoft.com/office/powerpoint/2010/main" Requires="p14">
+  <mc:AlternateContent xmlns:mc="http://schemas.openxmlformats.org/markup-compatibility/2006" xmlns:p14="http://schemas.microsoft.com/office/powerpoint/2010/main">
+    <mc:Choice Requires="p14">
       <p:transition spd="slow" p14:dur="1300">
         <p14:pan dir="u"/>
       </p:transition>
     </mc:Choice>
-    <mc:Fallback>
+    <mc:Fallback xmlns="">
       <p:transition spd="slow">
         <p:fade/>
       </p:transition>
